--- a/catalog/samples/process_flow.pptx
+++ b/catalog/samples/process_flow.pptx
@@ -1422,7 +1422,7 @@
           </a:p>
           <a:p>
             <a:r>
-              <a:t>  "template_sha256": "bc91a3ebc6e3368a6be1dfd059e09315de5ad0e8f16ac11047f4c634308365a3"</a:t>
+              <a:t>  "template_sha256": "0d768e5fd3e65580728fb4d58f8e14b7e5be62d8531164949d9c5c5d6fd06084"</a:t>
             </a:r>
           </a:p>
           <a:p>
